--- a/slides/S2_picoscope.pptx
+++ b/slides/S2_picoscope.pptx
@@ -5148,7 +5148,7 @@
         <p:spPr/>
         <p:txBody>
           <a:bodyPr>
-            <a:normAutofit fontScale="92500"/>
+            <a:normAutofit fontScale="92500" lnSpcReduction="20000"/>
           </a:bodyPr>
           <a:lstStyle/>
           <a:p>
@@ -5237,7 +5237,16 @@
               <a:rPr lang="en-US" dirty="0"/>
               <a:t> Peak to Peak.</a:t>
             </a:r>
-            <a:endParaRPr lang="nl-NL" dirty="0"/>
+          </a:p>
+          <a:p>
+            <a:r>
+              <a:rPr lang="nl-NL" b="1" dirty="0"/>
+              <a:t>A</a:t>
+            </a:r>
+            <a:r>
+              <a:rPr lang="nl-NL" dirty="0"/>
+              <a:t> Amplitude is de maximale uitwijking van een signaal ten opzichte van het midden van de golf.</a:t>
+            </a:r>
           </a:p>
           <a:p>
             <a:r>
@@ -5258,6 +5267,9 @@
               <a:rPr lang="nl-NL" dirty="0"/>
               <a:t> De periodetijd: de tijd van één volledige cyclus. De relatie is: f = 1 / T en dus T = 1 / f.</a:t>
             </a:r>
+          </a:p>
+          <a:p>
+            <a:endParaRPr lang="nl-NL" dirty="0"/>
           </a:p>
           <a:p>
             <a:endParaRPr lang="nl-NL" dirty="0"/>

--- a/slides/S2_picoscope.pptx
+++ b/slides/S2_picoscope.pptx
@@ -5376,7 +5376,7 @@
         <p:spPr/>
         <p:txBody>
           <a:bodyPr>
-            <a:normAutofit fontScale="92500" lnSpcReduction="20000"/>
+            <a:normAutofit fontScale="85000" lnSpcReduction="20000"/>
           </a:bodyPr>
           <a:lstStyle/>
           <a:p>
@@ -5461,7 +5461,7 @@
             </a:pPr>
             <a:r>
               <a:rPr lang="nl-NL" dirty="0"/>
-              <a:t>	gemiddelde waarde = 2,5 V</a:t>
+              <a:t>	gemiddelde waarde = 2,5 V </a:t>
             </a:r>
           </a:p>
           <a:p>
@@ -5470,7 +5470,40 @@
             </a:pPr>
             <a:r>
               <a:rPr lang="nl-NL" dirty="0"/>
-              <a:t>Dan is 2,5 V de gelijkspanningscomponent of DC-offset.</a:t>
+              <a:t>Namelijk (</a:t>
+            </a:r>
+            <a:r>
+              <a:rPr lang="nl-NL" dirty="0" err="1"/>
+              <a:t>Vmax</a:t>
+            </a:r>
+            <a:r>
+              <a:rPr lang="nl-NL" dirty="0"/>
+              <a:t> + </a:t>
+            </a:r>
+            <a:r>
+              <a:rPr lang="nl-NL" dirty="0" err="1"/>
+              <a:t>Vmin</a:t>
+            </a:r>
+            <a:r>
+              <a:rPr lang="nl-NL" dirty="0"/>
+              <a:t>) / 2 gebruik je om het midden van het signaal te vinden.</a:t>
+            </a:r>
+          </a:p>
+          <a:p>
+            <a:pPr marL="0" indent="0">
+              <a:buNone/>
+            </a:pPr>
+            <a:r>
+              <a:rPr lang="nl-NL" dirty="0"/>
+              <a:t>Dan is 2,5 V de </a:t>
+            </a:r>
+            <a:r>
+              <a:rPr lang="nl-NL" b="1" dirty="0"/>
+              <a:t>gelijkspanningscomponent of DC-offset</a:t>
+            </a:r>
+            <a:r>
+              <a:rPr lang="nl-NL" dirty="0"/>
+              <a:t>.</a:t>
             </a:r>
           </a:p>
           <a:p>
@@ -5478,6 +5511,38 @@
               <a:buNone/>
             </a:pPr>
             <a:endParaRPr lang="nl-NL" dirty="0"/>
+          </a:p>
+        </p:txBody>
+      </p:sp>
+      <p:sp>
+        <p:nvSpPr>
+          <p:cNvPr id="3" name="Tekstvak 2">
+            <a:extLst>
+              <a:ext uri="{FF2B5EF4-FFF2-40B4-BE49-F238E27FC236}">
+                <a16:creationId xmlns:a16="http://schemas.microsoft.com/office/drawing/2014/main" id="{66F5A95E-4887-A1AD-2F84-50CFFE871088}"/>
+              </a:ext>
+            </a:extLst>
+          </p:cNvPr>
+          <p:cNvSpPr txBox="1"/>
+          <p:nvPr/>
+        </p:nvSpPr>
+        <p:spPr>
+          <a:xfrm>
+            <a:off x="-7450111" y="-2008682"/>
+            <a:ext cx="184731" cy="369332"/>
+          </a:xfrm>
+          <a:prstGeom prst="rect">
+            <a:avLst/>
+          </a:prstGeom>
+          <a:noFill/>
+        </p:spPr>
+        <p:txBody>
+          <a:bodyPr wrap="none" rtlCol="0">
+            <a:spAutoFit/>
+          </a:bodyPr>
+          <a:lstStyle/>
+          <a:p>
+            <a:endParaRPr lang="nl-NL"/>
           </a:p>
         </p:txBody>
       </p:sp>

--- a/slides/S2_picoscope.pptx
+++ b/slides/S2_picoscope.pptx
@@ -5,7 +5,7 @@
     <p:sldMasterId id="2147483648" r:id="rId1"/>
   </p:sldMasterIdLst>
   <p:notesMasterIdLst>
-    <p:notesMasterId r:id="rId11"/>
+    <p:notesMasterId r:id="rId12"/>
   </p:notesMasterIdLst>
   <p:sldIdLst>
     <p:sldId id="256" r:id="rId2"/>
@@ -16,7 +16,8 @@
     <p:sldId id="304" r:id="rId7"/>
     <p:sldId id="305" r:id="rId8"/>
     <p:sldId id="306" r:id="rId9"/>
-    <p:sldId id="302" r:id="rId10"/>
+    <p:sldId id="307" r:id="rId10"/>
+    <p:sldId id="302" r:id="rId11"/>
   </p:sldIdLst>
   <p:sldSz cx="12192000" cy="6858000"/>
   <p:notesSz cx="6858000" cy="9144000"/>
@@ -205,7 +206,7 @@
           <a:p>
             <a:fld id="{DAA656B2-ED32-8044-9B2A-829653741135}" type="datetimeFigureOut">
               <a:rPr lang="nl-NL" smtClean="0"/>
-              <a:t>12-04-2026</a:t>
+              <a:t>13-4-2026</a:t>
             </a:fld>
             <a:endParaRPr lang="nl-NL"/>
           </a:p>
@@ -1044,6 +1045,161 @@
 </p:notes>
 </file>
 
+<file path=ppt/notesSlides/notesSlide6.xml><?xml version="1.0" encoding="utf-8"?>
+<p:notes xmlns:a="http://schemas.openxmlformats.org/drawingml/2006/main" xmlns:r="http://schemas.openxmlformats.org/officeDocument/2006/relationships" xmlns:p="http://schemas.openxmlformats.org/presentationml/2006/main">
+  <p:cSld>
+    <p:spTree>
+      <p:nvGrpSpPr>
+        <p:cNvPr id="1" name="">
+          <a:extLst>
+            <a:ext uri="{FF2B5EF4-FFF2-40B4-BE49-F238E27FC236}">
+              <a16:creationId xmlns:a16="http://schemas.microsoft.com/office/drawing/2014/main" id="{4771701D-DBDB-018A-F668-C8C1CD01F22A}"/>
+            </a:ext>
+          </a:extLst>
+        </p:cNvPr>
+        <p:cNvGrpSpPr/>
+        <p:nvPr/>
+      </p:nvGrpSpPr>
+      <p:grpSpPr>
+        <a:xfrm>
+          <a:off x="0" y="0"/>
+          <a:ext cx="0" cy="0"/>
+          <a:chOff x="0" y="0"/>
+          <a:chExt cx="0" cy="0"/>
+        </a:xfrm>
+      </p:grpSpPr>
+      <p:sp>
+        <p:nvSpPr>
+          <p:cNvPr id="2" name="Tijdelijke aanduiding voor dia-afbeelding 1">
+            <a:extLst>
+              <a:ext uri="{FF2B5EF4-FFF2-40B4-BE49-F238E27FC236}">
+                <a16:creationId xmlns:a16="http://schemas.microsoft.com/office/drawing/2014/main" id="{8B4035FD-51FD-7DAB-0556-0950CEC1E8F5}"/>
+              </a:ext>
+            </a:extLst>
+          </p:cNvPr>
+          <p:cNvSpPr>
+            <a:spLocks noGrp="1" noRot="1" noChangeAspect="1"/>
+          </p:cNvSpPr>
+          <p:nvPr>
+            <p:ph type="sldImg"/>
+          </p:nvPr>
+        </p:nvSpPr>
+        <p:spPr/>
+      </p:sp>
+      <p:sp>
+        <p:nvSpPr>
+          <p:cNvPr id="3" name="Tijdelijke aanduiding voor notities 2">
+            <a:extLst>
+              <a:ext uri="{FF2B5EF4-FFF2-40B4-BE49-F238E27FC236}">
+                <a16:creationId xmlns:a16="http://schemas.microsoft.com/office/drawing/2014/main" id="{894183BF-FBFB-D0C6-E6FC-6D4694DC2638}"/>
+              </a:ext>
+            </a:extLst>
+          </p:cNvPr>
+          <p:cNvSpPr>
+            <a:spLocks noGrp="1"/>
+          </p:cNvSpPr>
+          <p:nvPr>
+            <p:ph type="body" idx="1"/>
+          </p:nvPr>
+        </p:nvSpPr>
+        <p:spPr/>
+        <p:txBody>
+          <a:bodyPr/>
+          <a:lstStyle/>
+          <a:p>
+            <a:r>
+              <a:rPr lang="nl-NL" dirty="0" err="1"/>
+              <a:t>https</a:t>
+            </a:r>
+            <a:r>
+              <a:rPr lang="nl-NL" dirty="0"/>
+              <a:t>://</a:t>
+            </a:r>
+            <a:r>
+              <a:rPr lang="nl-NL" dirty="0" err="1"/>
+              <a:t>learn.sparkfun.com</a:t>
+            </a:r>
+            <a:r>
+              <a:rPr lang="nl-NL" dirty="0"/>
+              <a:t>/</a:t>
+            </a:r>
+            <a:r>
+              <a:rPr lang="nl-NL" dirty="0" err="1"/>
+              <a:t>tutorials</a:t>
+            </a:r>
+            <a:r>
+              <a:rPr lang="nl-NL" dirty="0"/>
+              <a:t>/</a:t>
+            </a:r>
+            <a:r>
+              <a:rPr lang="nl-NL" dirty="0" err="1"/>
+              <a:t>pulse-width-modulation</a:t>
+            </a:r>
+            <a:r>
+              <a:rPr lang="nl-NL" dirty="0"/>
+              <a:t>/</a:t>
+            </a:r>
+            <a:r>
+              <a:rPr lang="nl-NL" dirty="0" err="1"/>
+              <a:t>all</a:t>
+            </a:r>
+            <a:endParaRPr lang="nl-NL" dirty="0"/>
+          </a:p>
+          <a:p>
+            <a:endParaRPr lang="nl-NL" sz="1200" b="0" i="0" kern="1200" dirty="0">
+              <a:solidFill>
+                <a:schemeClr val="tx1"/>
+              </a:solidFill>
+              <a:effectLst/>
+              <a:latin typeface="+mn-lt"/>
+              <a:ea typeface="+mn-ea"/>
+              <a:cs typeface="+mn-cs"/>
+            </a:endParaRPr>
+          </a:p>
+        </p:txBody>
+      </p:sp>
+      <p:sp>
+        <p:nvSpPr>
+          <p:cNvPr id="4" name="Tijdelijke aanduiding voor dianummer 3">
+            <a:extLst>
+              <a:ext uri="{FF2B5EF4-FFF2-40B4-BE49-F238E27FC236}">
+                <a16:creationId xmlns:a16="http://schemas.microsoft.com/office/drawing/2014/main" id="{BE64DE91-E87B-736E-EBA8-CE92FD854D0E}"/>
+              </a:ext>
+            </a:extLst>
+          </p:cNvPr>
+          <p:cNvSpPr>
+            <a:spLocks noGrp="1"/>
+          </p:cNvSpPr>
+          <p:nvPr>
+            <p:ph type="sldNum" sz="quarter" idx="5"/>
+          </p:nvPr>
+        </p:nvSpPr>
+        <p:spPr/>
+        <p:txBody>
+          <a:bodyPr/>
+          <a:lstStyle/>
+          <a:p>
+            <a:fld id="{11B76DE4-D675-834A-A8C5-F6A601043E90}" type="slidenum">
+              <a:rPr lang="nl-NL" smtClean="0"/>
+              <a:t>9</a:t>
+            </a:fld>
+            <a:endParaRPr lang="nl-NL"/>
+          </a:p>
+        </p:txBody>
+      </p:sp>
+    </p:spTree>
+    <p:extLst>
+      <p:ext uri="{BB962C8B-B14F-4D97-AF65-F5344CB8AC3E}">
+        <p14:creationId xmlns:p14="http://schemas.microsoft.com/office/powerpoint/2010/main" val="2440395934"/>
+      </p:ext>
+    </p:extLst>
+  </p:cSld>
+  <p:clrMapOvr>
+    <a:masterClrMapping/>
+  </p:clrMapOvr>
+</p:notes>
+</file>
+
 <file path=ppt/slideLayouts/slideLayout1.xml><?xml version="1.0" encoding="utf-8"?>
 <p:sldLayout xmlns:a="http://schemas.openxmlformats.org/drawingml/2006/main" xmlns:r="http://schemas.openxmlformats.org/officeDocument/2006/relationships" xmlns:p="http://schemas.openxmlformats.org/presentationml/2006/main" type="title" preserve="1">
   <p:cSld name="Title Slide">
@@ -1193,7 +1349,7 @@
           <a:p>
             <a:fld id="{3A7CBCB4-1EFE-4E3B-9C8A-BCC4F06648F3}" type="datetimeFigureOut">
               <a:rPr lang="en-NL" smtClean="0"/>
-              <a:t>4/12/26</a:t>
+              <a:t>04/13/2026</a:t>
             </a:fld>
             <a:endParaRPr lang="en-NL"/>
           </a:p>
@@ -1393,7 +1549,7 @@
           <a:p>
             <a:fld id="{3A7CBCB4-1EFE-4E3B-9C8A-BCC4F06648F3}" type="datetimeFigureOut">
               <a:rPr lang="en-NL" smtClean="0"/>
-              <a:t>4/12/26</a:t>
+              <a:t>04/13/2026</a:t>
             </a:fld>
             <a:endParaRPr lang="en-NL"/>
           </a:p>
@@ -1603,7 +1759,7 @@
           <a:p>
             <a:fld id="{3A7CBCB4-1EFE-4E3B-9C8A-BCC4F06648F3}" type="datetimeFigureOut">
               <a:rPr lang="en-NL" smtClean="0"/>
-              <a:t>4/12/26</a:t>
+              <a:t>04/13/2026</a:t>
             </a:fld>
             <a:endParaRPr lang="en-NL"/>
           </a:p>
@@ -1803,7 +1959,7 @@
           <a:p>
             <a:fld id="{3A7CBCB4-1EFE-4E3B-9C8A-BCC4F06648F3}" type="datetimeFigureOut">
               <a:rPr lang="en-NL" smtClean="0"/>
-              <a:t>4/12/26</a:t>
+              <a:t>04/13/2026</a:t>
             </a:fld>
             <a:endParaRPr lang="en-NL"/>
           </a:p>
@@ -2079,7 +2235,7 @@
           <a:p>
             <a:fld id="{3A7CBCB4-1EFE-4E3B-9C8A-BCC4F06648F3}" type="datetimeFigureOut">
               <a:rPr lang="en-NL" smtClean="0"/>
-              <a:t>4/12/26</a:t>
+              <a:t>04/13/2026</a:t>
             </a:fld>
             <a:endParaRPr lang="en-NL"/>
           </a:p>
@@ -2347,7 +2503,7 @@
           <a:p>
             <a:fld id="{3A7CBCB4-1EFE-4E3B-9C8A-BCC4F06648F3}" type="datetimeFigureOut">
               <a:rPr lang="en-NL" smtClean="0"/>
-              <a:t>4/12/26</a:t>
+              <a:t>04/13/2026</a:t>
             </a:fld>
             <a:endParaRPr lang="en-NL"/>
           </a:p>
@@ -2762,7 +2918,7 @@
           <a:p>
             <a:fld id="{3A7CBCB4-1EFE-4E3B-9C8A-BCC4F06648F3}" type="datetimeFigureOut">
               <a:rPr lang="en-NL" smtClean="0"/>
-              <a:t>4/12/26</a:t>
+              <a:t>04/13/2026</a:t>
             </a:fld>
             <a:endParaRPr lang="en-NL"/>
           </a:p>
@@ -2904,7 +3060,7 @@
           <a:p>
             <a:fld id="{3A7CBCB4-1EFE-4E3B-9C8A-BCC4F06648F3}" type="datetimeFigureOut">
               <a:rPr lang="en-NL" smtClean="0"/>
-              <a:t>4/12/26</a:t>
+              <a:t>04/13/2026</a:t>
             </a:fld>
             <a:endParaRPr lang="en-NL"/>
           </a:p>
@@ -3017,7 +3173,7 @@
           <a:p>
             <a:fld id="{3A7CBCB4-1EFE-4E3B-9C8A-BCC4F06648F3}" type="datetimeFigureOut">
               <a:rPr lang="en-NL" smtClean="0"/>
-              <a:t>4/12/26</a:t>
+              <a:t>04/13/2026</a:t>
             </a:fld>
             <a:endParaRPr lang="en-NL"/>
           </a:p>
@@ -3330,7 +3486,7 @@
           <a:p>
             <a:fld id="{3A7CBCB4-1EFE-4E3B-9C8A-BCC4F06648F3}" type="datetimeFigureOut">
               <a:rPr lang="en-NL" smtClean="0"/>
-              <a:t>4/12/26</a:t>
+              <a:t>04/13/2026</a:t>
             </a:fld>
             <a:endParaRPr lang="en-NL"/>
           </a:p>
@@ -3619,7 +3775,7 @@
           <a:p>
             <a:fld id="{3A7CBCB4-1EFE-4E3B-9C8A-BCC4F06648F3}" type="datetimeFigureOut">
               <a:rPr lang="en-NL" smtClean="0"/>
-              <a:t>4/12/26</a:t>
+              <a:t>04/13/2026</a:t>
             </a:fld>
             <a:endParaRPr lang="en-NL"/>
           </a:p>
@@ -3862,7 +4018,7 @@
           <a:p>
             <a:fld id="{3A7CBCB4-1EFE-4E3B-9C8A-BCC4F06648F3}" type="datetimeFigureOut">
               <a:rPr lang="en-NL" smtClean="0"/>
-              <a:t>4/12/26</a:t>
+              <a:t>04/13/2026</a:t>
             </a:fld>
             <a:endParaRPr lang="en-NL"/>
           </a:p>
@@ -4493,6 +4649,99 @@
 </p:sld>
 </file>
 
+<file path=ppt/slides/slide10.xml><?xml version="1.0" encoding="utf-8"?>
+<p:sld xmlns:a="http://schemas.openxmlformats.org/drawingml/2006/main" xmlns:r="http://schemas.openxmlformats.org/officeDocument/2006/relationships" xmlns:p="http://schemas.openxmlformats.org/presentationml/2006/main">
+  <p:cSld>
+    <p:spTree>
+      <p:nvGrpSpPr>
+        <p:cNvPr id="1" name=""/>
+        <p:cNvGrpSpPr/>
+        <p:nvPr/>
+      </p:nvGrpSpPr>
+      <p:grpSpPr>
+        <a:xfrm>
+          <a:off x="0" y="0"/>
+          <a:ext cx="0" cy="0"/>
+          <a:chOff x="0" y="0"/>
+          <a:chExt cx="0" cy="0"/>
+        </a:xfrm>
+      </p:grpSpPr>
+      <p:sp>
+        <p:nvSpPr>
+          <p:cNvPr id="2" name="Title 1">
+            <a:extLst>
+              <a:ext uri="{FF2B5EF4-FFF2-40B4-BE49-F238E27FC236}">
+                <a16:creationId xmlns:a16="http://schemas.microsoft.com/office/drawing/2014/main" id="{ED86E016-5D62-B09E-AF3C-85136D836E48}"/>
+              </a:ext>
+            </a:extLst>
+          </p:cNvPr>
+          <p:cNvSpPr>
+            <a:spLocks noGrp="1"/>
+          </p:cNvSpPr>
+          <p:nvPr>
+            <p:ph type="title"/>
+          </p:nvPr>
+        </p:nvSpPr>
+        <p:spPr/>
+        <p:txBody>
+          <a:bodyPr/>
+          <a:lstStyle/>
+          <a:p>
+            <a:r>
+              <a:rPr lang="en-US" dirty="0"/>
+              <a:t>En dan nu.. Aan de slag!</a:t>
+            </a:r>
+            <a:endParaRPr lang="en-NL" dirty="0"/>
+          </a:p>
+        </p:txBody>
+      </p:sp>
+      <p:sp>
+        <p:nvSpPr>
+          <p:cNvPr id="3" name="Content Placeholder 2">
+            <a:extLst>
+              <a:ext uri="{FF2B5EF4-FFF2-40B4-BE49-F238E27FC236}">
+                <a16:creationId xmlns:a16="http://schemas.microsoft.com/office/drawing/2014/main" id="{BDAE17AB-7DC7-DDDA-C33E-2F6219D15F37}"/>
+              </a:ext>
+            </a:extLst>
+          </p:cNvPr>
+          <p:cNvSpPr>
+            <a:spLocks noGrp="1"/>
+          </p:cNvSpPr>
+          <p:nvPr>
+            <p:ph idx="1"/>
+          </p:nvPr>
+        </p:nvSpPr>
+        <p:spPr/>
+        <p:txBody>
+          <a:bodyPr/>
+          <a:lstStyle/>
+          <a:p>
+            <a:r>
+              <a:rPr lang="nl-NL" noProof="0" dirty="0"/>
+              <a:t>Maak teams 2-3 studenten</a:t>
+            </a:r>
+          </a:p>
+          <a:p>
+            <a:r>
+              <a:rPr lang="nl-NL" noProof="0" dirty="0"/>
+              <a:t>Ga meten en vul het meetrapport in.</a:t>
+            </a:r>
+          </a:p>
+        </p:txBody>
+      </p:sp>
+    </p:spTree>
+    <p:extLst>
+      <p:ext uri="{BB962C8B-B14F-4D97-AF65-F5344CB8AC3E}">
+        <p14:creationId xmlns:p14="http://schemas.microsoft.com/office/powerpoint/2010/main" val="2067029959"/>
+      </p:ext>
+    </p:extLst>
+  </p:cSld>
+  <p:clrMapOvr>
+    <a:masterClrMapping/>
+  </p:clrMapOvr>
+</p:sld>
+</file>
+
 <file path=ppt/slides/slide2.xml><?xml version="1.0" encoding="utf-8"?>
 <p:sld xmlns:a="http://schemas.openxmlformats.org/drawingml/2006/main" xmlns:r="http://schemas.openxmlformats.org/officeDocument/2006/relationships" xmlns:p="http://schemas.openxmlformats.org/presentationml/2006/main">
   <p:cSld>
@@ -5376,7 +5625,7 @@
         <p:spPr/>
         <p:txBody>
           <a:bodyPr>
-            <a:normAutofit fontScale="85000" lnSpcReduction="20000"/>
+            <a:normAutofit fontScale="77500" lnSpcReduction="20000"/>
           </a:bodyPr>
           <a:lstStyle/>
           <a:p>
@@ -5386,7 +5635,15 @@
             </a:r>
             <a:r>
               <a:rPr lang="nl-NL" dirty="0"/>
-              <a:t>Als je de offset wilt zien, moet je DC-koppeling gebruiken. Dan zie je zowel de wisselcomponent als de gelijkspanningscomponent tegelijk. AC-koppeling haalt juist de DC-component weg, zodat alleen de wisselcomponent rond 0 V zichtbaar blijft.</a:t>
+              <a:t>Als je de offset wilt zien, moet je DC-koppeling gebruiken. Dan zie je zowel de wisselcomponent als de gelijkspanningscomponent tegelijk. AC-koppeling haalt juist de DC-component weg, zodat alleen de wisselcomponent rond 0 V zichtbaar blijft. Met een </a:t>
+            </a:r>
+            <a:r>
+              <a:rPr lang="nl-NL" dirty="0" err="1"/>
+              <a:t>Arduino</a:t>
+            </a:r>
+            <a:r>
+              <a:rPr lang="nl-NL" dirty="0"/>
+              <a:t> kunnen we geen negatieve spanningen maken daarom is er altijd een DC-offset.</a:t>
             </a:r>
           </a:p>
           <a:p>
@@ -5833,7 +6090,13 @@
   <p:cSld>
     <p:spTree>
       <p:nvGrpSpPr>
-        <p:cNvPr id="1" name=""/>
+        <p:cNvPr id="1" name="">
+          <a:extLst>
+            <a:ext uri="{FF2B5EF4-FFF2-40B4-BE49-F238E27FC236}">
+              <a16:creationId xmlns:a16="http://schemas.microsoft.com/office/drawing/2014/main" id="{738EBEAA-858B-C361-C27F-C2F3C44E14D1}"/>
+            </a:ext>
+          </a:extLst>
+        </p:cNvPr>
         <p:cNvGrpSpPr/>
         <p:nvPr/>
       </p:nvGrpSpPr>
@@ -5850,7 +6113,7 @@
           <p:cNvPr id="2" name="Title 1">
             <a:extLst>
               <a:ext uri="{FF2B5EF4-FFF2-40B4-BE49-F238E27FC236}">
-                <a16:creationId xmlns:a16="http://schemas.microsoft.com/office/drawing/2014/main" id="{ED86E016-5D62-B09E-AF3C-85136D836E48}"/>
+                <a16:creationId xmlns:a16="http://schemas.microsoft.com/office/drawing/2014/main" id="{F8D46067-E2F8-443B-264C-30F477D1B4BD}"/>
               </a:ext>
             </a:extLst>
           </p:cNvPr>
@@ -5867,8 +6130,20 @@
           <a:lstStyle/>
           <a:p>
             <a:r>
+              <a:rPr lang="en-US" dirty="0" err="1"/>
+              <a:t>Gelijkspanningscomponent</a:t>
+            </a:r>
+            <a:r>
               <a:rPr lang="en-US" dirty="0"/>
-              <a:t>En dan nu.. Aan de slag!</a:t>
+              <a:t> </a:t>
+            </a:r>
+            <a:r>
+              <a:rPr lang="en-US" dirty="0" err="1"/>
+              <a:t>bij</a:t>
+            </a:r>
+            <a:r>
+              <a:rPr lang="en-US" dirty="0"/>
+              <a:t> PWM</a:t>
             </a:r>
             <a:endParaRPr lang="en-NL" dirty="0"/>
           </a:p>
@@ -5876,10 +6151,10 @@
       </p:sp>
       <p:sp>
         <p:nvSpPr>
-          <p:cNvPr id="3" name="Content Placeholder 2">
-            <a:extLst>
-              <a:ext uri="{FF2B5EF4-FFF2-40B4-BE49-F238E27FC236}">
-                <a16:creationId xmlns:a16="http://schemas.microsoft.com/office/drawing/2014/main" id="{BDAE17AB-7DC7-DDDA-C33E-2F6219D15F37}"/>
+          <p:cNvPr id="6" name="Tijdelijke aanduiding voor inhoud 5">
+            <a:extLst>
+              <a:ext uri="{FF2B5EF4-FFF2-40B4-BE49-F238E27FC236}">
+                <a16:creationId xmlns:a16="http://schemas.microsoft.com/office/drawing/2014/main" id="{F1C4281F-7DE3-C886-9B53-FAD2BE2DBFD7}"/>
               </a:ext>
             </a:extLst>
           </p:cNvPr>
@@ -5890,28 +6165,161 @@
             <p:ph idx="1"/>
           </p:nvPr>
         </p:nvSpPr>
-        <p:spPr/>
-        <p:txBody>
-          <a:bodyPr/>
-          <a:lstStyle/>
-          <a:p>
-            <a:r>
-              <a:rPr lang="nl-NL" noProof="0" dirty="0"/>
-              <a:t>Maak teams 2-3 studenten</a:t>
-            </a:r>
-          </a:p>
-          <a:p>
-            <a:r>
-              <a:rPr lang="nl-NL" noProof="0" dirty="0"/>
-              <a:t>Ga meten en vul het meetrapport in.</a:t>
-            </a:r>
+        <p:spPr>
+          <a:xfrm>
+            <a:off x="838200" y="1690688"/>
+            <a:ext cx="10515600" cy="4351338"/>
+          </a:xfrm>
+        </p:spPr>
+        <p:txBody>
+          <a:bodyPr>
+            <a:normAutofit/>
+          </a:bodyPr>
+          <a:lstStyle/>
+          <a:p>
+            <a:r>
+              <a:rPr lang="nl-NL" dirty="0"/>
+              <a:t>Gemiddelde spanning waar het signaal omheen ligt. </a:t>
+            </a:r>
+          </a:p>
+          <a:p>
+            <a:pPr marL="0" indent="0">
+              <a:buNone/>
+            </a:pPr>
+            <a:r>
+              <a:rPr lang="nl-NL" dirty="0"/>
+              <a:t>Bij PWM of een puls signaal hangt deze niet alleen af van </a:t>
+            </a:r>
+            <a:r>
+              <a:rPr lang="nl-NL" dirty="0" err="1"/>
+              <a:t>Vmax</a:t>
+            </a:r>
+            <a:r>
+              <a:rPr lang="nl-NL" dirty="0"/>
+              <a:t> en </a:t>
+            </a:r>
+            <a:r>
+              <a:rPr lang="nl-NL" dirty="0" err="1"/>
+              <a:t>Vmin</a:t>
+            </a:r>
+            <a:r>
+              <a:rPr lang="nl-NL" dirty="0"/>
+              <a:t> maar vooral van </a:t>
+            </a:r>
+            <a:r>
+              <a:rPr lang="nl-NL" b="1" dirty="0"/>
+              <a:t>hoe lang het signaal hoog is </a:t>
+            </a:r>
+            <a:r>
+              <a:rPr lang="nl-NL" dirty="0"/>
+              <a:t>binnen één periode. </a:t>
+            </a:r>
+            <a:r>
+              <a:rPr lang="nl-NL" dirty="0" err="1"/>
+              <a:t>Udc</a:t>
+            </a:r>
+            <a:r>
+              <a:rPr lang="nl-NL" dirty="0"/>
+              <a:t> = D * 5V (bij </a:t>
+            </a:r>
+            <a:r>
+              <a:rPr lang="nl-NL" dirty="0" err="1"/>
+              <a:t>Arduino</a:t>
+            </a:r>
+            <a:r>
+              <a:rPr lang="nl-NL" dirty="0"/>
+              <a:t> </a:t>
+            </a:r>
+            <a:r>
+              <a:rPr lang="nl-NL" dirty="0" err="1"/>
+              <a:t>Uno</a:t>
+            </a:r>
+            <a:r>
+              <a:rPr lang="nl-NL" dirty="0"/>
+              <a:t>). </a:t>
+            </a:r>
+          </a:p>
+        </p:txBody>
+      </p:sp>
+      <p:pic>
+        <p:nvPicPr>
+          <p:cNvPr id="3" name="Afbeelding 2">
+            <a:extLst>
+              <a:ext uri="{FF2B5EF4-FFF2-40B4-BE49-F238E27FC236}">
+                <a16:creationId xmlns:a16="http://schemas.microsoft.com/office/drawing/2014/main" id="{BE5BC657-A4EF-FE65-36B1-11DE534EAD1C}"/>
+              </a:ext>
+            </a:extLst>
+          </p:cNvPr>
+          <p:cNvPicPr>
+            <a:picLocks noChangeAspect="1"/>
+          </p:cNvPicPr>
+          <p:nvPr/>
+        </p:nvPicPr>
+        <p:blipFill>
+          <a:blip r:embed="rId3"/>
+          <a:stretch>
+            <a:fillRect/>
+          </a:stretch>
+        </p:blipFill>
+        <p:spPr>
+          <a:xfrm>
+            <a:off x="8859186" y="4678872"/>
+            <a:ext cx="2908092" cy="1994462"/>
+          </a:xfrm>
+          <a:prstGeom prst="rect">
+            <a:avLst/>
+          </a:prstGeom>
+        </p:spPr>
+      </p:pic>
+      <p:sp>
+        <p:nvSpPr>
+          <p:cNvPr id="4" name="Tekstvak 3">
+            <a:extLst>
+              <a:ext uri="{FF2B5EF4-FFF2-40B4-BE49-F238E27FC236}">
+                <a16:creationId xmlns:a16="http://schemas.microsoft.com/office/drawing/2014/main" id="{B45690F6-EEB9-39F6-0636-20BE135AB723}"/>
+              </a:ext>
+            </a:extLst>
+          </p:cNvPr>
+          <p:cNvSpPr txBox="1"/>
+          <p:nvPr/>
+        </p:nvSpPr>
+        <p:spPr>
+          <a:xfrm>
+            <a:off x="584617" y="5672694"/>
+            <a:ext cx="8030212" cy="646331"/>
+          </a:xfrm>
+          <a:prstGeom prst="rect">
+            <a:avLst/>
+          </a:prstGeom>
+          <a:noFill/>
+        </p:spPr>
+        <p:txBody>
+          <a:bodyPr wrap="none" rtlCol="0">
+            <a:spAutoFit/>
+          </a:bodyPr>
+          <a:lstStyle/>
+          <a:p>
+            <a:r>
+              <a:rPr lang="nl-NL" dirty="0"/>
+              <a:t>Image source: </a:t>
+            </a:r>
+            <a:r>
+              <a:rPr lang="nl-NL" dirty="0">
+                <a:hlinkClick r:id="rId4"/>
+              </a:rPr>
+              <a:t>https://learn.sparkfun.com/tutorials/pulse-width-modulation/all</a:t>
+            </a:r>
+            <a:endParaRPr lang="nl-NL" dirty="0"/>
+          </a:p>
+          <a:p>
+            <a:endParaRPr lang="nl-NL" dirty="0"/>
           </a:p>
         </p:txBody>
       </p:sp>
     </p:spTree>
     <p:extLst>
       <p:ext uri="{BB962C8B-B14F-4D97-AF65-F5344CB8AC3E}">
-        <p14:creationId xmlns:p14="http://schemas.microsoft.com/office/powerpoint/2010/main" val="2067029959"/>
+        <p14:creationId xmlns:p14="http://schemas.microsoft.com/office/powerpoint/2010/main" val="2537195932"/>
       </p:ext>
     </p:extLst>
   </p:cSld>
